--- a/decks/geog-urban/geog-urban_ch1_urban-world.pptx
+++ b/decks/geog-urban/geog-urban_ch1_urban-world.pptx
@@ -126,30 +126,30 @@
   <p:extLst>
     <p:ext uri="{521415D9-36F7-43E2-AB2F-B90AF26B5E84}">
       <p14:sectionLst xmlns:p14="http://schemas.microsoft.com/office/powerpoint/2010/main">
-        <p14:section name="Opening" id="{53bc2782-8f86-1e95-51bf-b6b11f474fa5}">
+        <p14:section name="Opening" id="{4590a8e7-4264-a752-fba9-3475919f6b5b}">
           <p14:sldIdLst>
             <p14:sldId id="256"/>
           </p14:sldIdLst>
         </p14:section>
-        <p14:section name="Gate" id="{cbb6fddf-f038-97ea-fdc6-9f02c5c1bdf6}">
+        <p14:section name="Gate" id="{7ffd3ecf-0e5e-a9c2-d7b6-36666a976d6f}">
           <p14:sldIdLst>
             <p14:sldId id="257"/>
             <p14:sldId id="258"/>
           </p14:sldIdLst>
         </p14:section>
-        <p14:section name="Pre-teach" id="{58de03b7-6ce9-1f48-ad0e-32298a76dbaf}">
+        <p14:section name="Pre-teach" id="{9f930a37-8afc-a419-8fd7-be6e622ddd24}">
           <p14:sldIdLst>
             <p14:sldId id="259"/>
             <p14:sldId id="260"/>
           </p14:sldIdLst>
         </p14:section>
-        <p14:section name="Read-along" id="{2b153528-161b-caac-8d45-6e21a93c8c70}">
+        <p14:section name="Read-along" id="{2865ca86-dbc0-7692-e640-806189e41545}">
           <p14:sldIdLst>
             <p14:sldId id="261"/>
             <p14:sldId id="262"/>
           </p14:sldIdLst>
         </p14:section>
-        <p14:section name="Teach" id="{0e7d2183-c16c-909f-7b69-e2455ce6be2d}">
+        <p14:section name="Teach" id="{01b86f2e-22a6-9410-132c-b8af4f4df1c8}">
           <p14:sldIdLst>
             <p14:sldId id="263"/>
             <p14:sldId id="264"/>
@@ -158,7 +158,7 @@
             <p14:sldId id="267"/>
           </p14:sldIdLst>
         </p14:section>
-        <p14:section name="Routes" id="{e3f62a93-f584-2995-67a7-da153a2d55d6}">
+        <p14:section name="Routes" id="{345a20fd-edeb-5a41-f4fc-2009320b177d}">
           <p14:sldIdLst>
             <p14:sldId id="268"/>
             <p14:sldId id="269"/>
@@ -166,12 +166,12 @@
             <p14:sldId id="271"/>
           </p14:sldIdLst>
         </p14:section>
-        <p14:section name="Close" id="{0a5391c9-23a6-11d9-64eb-ace0e09534ce}">
+        <p14:section name="Close" id="{5d3468c8-0ff7-4f3f-e209-dd3ff69051d2}">
           <p14:sldIdLst>
             <p14:sldId id="272"/>
           </p14:sldIdLst>
         </p14:section>
-        <p14:section name="Answers" id="{bfe4317b-b7dc-602a-9f8b-9cb39773fb67}">
+        <p14:section name="Answers" id="{3d4c2654-60e4-1b06-7b76-c5bc00f08c0b}">
           <p14:sldIdLst>
             <p14:sldId id="273"/>
             <p14:sldId id="274"/>
@@ -859,7 +859,7 @@
               <a:rPr lang="en-US" dirty="0"/>
               <a:t>Teach — Millionaire cities and megacities. Say it in your own words, then check understanding with a quick question: ask a pupil from the pre-teach group first, since they met these words and ideas before the lesson. Pupils try to recall before you re-explain.
 Urbanisation has produced more and bigger cities. A millionaire city has a population of more than 1 million. In 1850 there were only two in the world, London and Paris. By 1950 there were 83, and by 2015 there were about 500. Before 1950 most millionaire cities were in HICs, in the temperate latitudes north of the Equator; now they are found across the world.
-A megacity is a city with more than 10 million people. In 1950 there were only three: London, New York and Tokyo. In 2014 there were 28: 16 in Asia, 4 in South America, 3 in Africa, 3 in Europe and 2 in North America. By 2030 the world is projected to have 41. In a 2014 list of the world's largest cities, Shanghai leads with 24.1 million, then Beijing and Karachi with 21.1 million each, Lagos with 16.1 million and Istanbul with 14.2 million; Shenzhen, the former fishing village, is there at 10.5 million. Notice that the pattern has shifted: most megacities are now in LICs and NEEs, not HICs.
+A megacity is a city with more than 10 million people. In 1950 there were only three: London, New York and Tokyo. In 2014 there were 28: 16 in Asia, 4 in South America, 3 in Africa, 3 in Europe and 2 in North America. Projections put the number at 41 by 2030. In a 2014 list of the world's largest cities, Shanghai leads with 24.1 million, then Beijing and Karachi with 21.1 million each, Lagos with 16.1 million and Istanbul with 14.2 million; Shenzhen, the former fishing village, is there at 10.5 million. Notice that the pattern has shifted: most megacities are now in LICs and NEEs, not HICs.
 Population figures like these are never exact. There are two good reasons: it is impossible to count a city's people one by one in real time, and the data may be out of date or copied wrongly. When you quote a city's population, give the year as well as the number.
 Tip: Millionaire city: more than 1 million. Megacity: more than 10 million. A megacity is always a millionaire city, but not the other way round.</a:t>
             </a:r>
